--- a/public/videos/repositories/smoking-spot-finder/smoking-spot-finder-tech-preview.pptx
+++ b/public/videos/repositories/smoking-spot-finder/smoking-spot-finder-tech-preview.pptx
@@ -134,7 +134,7 @@
           <p:cNvPr id="2" name="タイトル 1">
             <a:extLst>
               <a:ext uri="{FF2B5EF4-FFF2-40B4-BE49-F238E27FC236}">
-                <a16:creationId xmlns:a16="http://schemas.microsoft.com/office/drawing/2014/main" id="{56FF0D81-9E7D-42C5-9454-5B3983F01A1E}"/>
+                <a16:creationId xmlns:a16="http://schemas.microsoft.com/office/drawing/2014/main" id="{C1C79DC2-68CF-02BC-E8C0-CFD73F702CC4}"/>
               </a:ext>
             </a:extLst>
           </p:cNvPr>
@@ -171,7 +171,7 @@
           <p:cNvPr id="3" name="字幕 2">
             <a:extLst>
               <a:ext uri="{FF2B5EF4-FFF2-40B4-BE49-F238E27FC236}">
-                <a16:creationId xmlns:a16="http://schemas.microsoft.com/office/drawing/2014/main" id="{701A5125-25C5-C3F8-BF80-8C1FDE3EF9AE}"/>
+                <a16:creationId xmlns:a16="http://schemas.microsoft.com/office/drawing/2014/main" id="{60B11426-83A9-319B-C790-9B59C55105BC}"/>
               </a:ext>
             </a:extLst>
           </p:cNvPr>
@@ -241,7 +241,7 @@
           <p:cNvPr id="4" name="日付プレースホルダー 3">
             <a:extLst>
               <a:ext uri="{FF2B5EF4-FFF2-40B4-BE49-F238E27FC236}">
-                <a16:creationId xmlns:a16="http://schemas.microsoft.com/office/drawing/2014/main" id="{006B3E6F-2088-F294-2CF0-6BA54FE21B15}"/>
+                <a16:creationId xmlns:a16="http://schemas.microsoft.com/office/drawing/2014/main" id="{0B553119-44D9-DE32-B389-E96767636D42}"/>
               </a:ext>
             </a:extLst>
           </p:cNvPr>
@@ -257,7 +257,7 @@
           <a:bodyPr/>
           <a:lstStyle/>
           <a:p>
-            <a:fld id="{1976ACAB-01B6-49D9-BEB0-30BD540AD216}" type="datetimeFigureOut">
+            <a:fld id="{D13547F7-58F2-4860-A5CB-7650EEC5A09F}" type="datetimeFigureOut">
               <a:rPr kumimoji="1" lang="ja-JP" altLang="en-US" smtClean="0"/>
               <a:t>2026/7/30</a:t>
             </a:fld>
@@ -270,7 +270,7 @@
           <p:cNvPr id="5" name="フッター プレースホルダー 4">
             <a:extLst>
               <a:ext uri="{FF2B5EF4-FFF2-40B4-BE49-F238E27FC236}">
-                <a16:creationId xmlns:a16="http://schemas.microsoft.com/office/drawing/2014/main" id="{509F112E-EBDE-7C6E-CC46-4C16CE0B3400}"/>
+                <a16:creationId xmlns:a16="http://schemas.microsoft.com/office/drawing/2014/main" id="{4D989551-80BD-D10F-94C2-360E5FC7A871}"/>
               </a:ext>
             </a:extLst>
           </p:cNvPr>
@@ -295,7 +295,7 @@
           <p:cNvPr id="6" name="スライド番号プレースホルダー 5">
             <a:extLst>
               <a:ext uri="{FF2B5EF4-FFF2-40B4-BE49-F238E27FC236}">
-                <a16:creationId xmlns:a16="http://schemas.microsoft.com/office/drawing/2014/main" id="{9CA4B18B-07D6-1FEC-B0AC-F5BA55030036}"/>
+                <a16:creationId xmlns:a16="http://schemas.microsoft.com/office/drawing/2014/main" id="{21399AA5-B215-D185-A050-F7671C166E8C}"/>
               </a:ext>
             </a:extLst>
           </p:cNvPr>
@@ -311,7 +311,7 @@
           <a:bodyPr/>
           <a:lstStyle/>
           <a:p>
-            <a:fld id="{76155B34-8CEE-461C-8ACA-DA9D806EAADE}" type="slidenum">
+            <a:fld id="{2FE1FC7E-FF4E-4E42-A3E1-BBB7562D1753}" type="slidenum">
               <a:rPr kumimoji="1" lang="ja-JP" altLang="en-US" smtClean="0"/>
               <a:t>‹#›</a:t>
             </a:fld>
@@ -322,7 +322,7 @@
     </p:spTree>
     <p:extLst>
       <p:ext uri="{BB962C8B-B14F-4D97-AF65-F5344CB8AC3E}">
-        <p14:creationId xmlns:p14="http://schemas.microsoft.com/office/powerpoint/2010/main" val="3673688678"/>
+        <p14:creationId xmlns:p14="http://schemas.microsoft.com/office/powerpoint/2010/main" val="1089785498"/>
       </p:ext>
     </p:extLst>
   </p:cSld>
@@ -354,7 +354,7 @@
           <p:cNvPr id="2" name="タイトル 1">
             <a:extLst>
               <a:ext uri="{FF2B5EF4-FFF2-40B4-BE49-F238E27FC236}">
-                <a16:creationId xmlns:a16="http://schemas.microsoft.com/office/drawing/2014/main" id="{B4D25188-8EC3-3387-CF38-3D871984DA0D}"/>
+                <a16:creationId xmlns:a16="http://schemas.microsoft.com/office/drawing/2014/main" id="{64452578-0A47-8D09-BA20-6E732F21E62F}"/>
               </a:ext>
             </a:extLst>
           </p:cNvPr>
@@ -382,7 +382,7 @@
           <p:cNvPr id="3" name="縦書きテキスト プレースホルダー 2">
             <a:extLst>
               <a:ext uri="{FF2B5EF4-FFF2-40B4-BE49-F238E27FC236}">
-                <a16:creationId xmlns:a16="http://schemas.microsoft.com/office/drawing/2014/main" id="{2C02C6EE-08F1-3083-D272-74614B776C62}"/>
+                <a16:creationId xmlns:a16="http://schemas.microsoft.com/office/drawing/2014/main" id="{C40C4C77-E9B2-0B63-4478-2D4E98BAA878}"/>
               </a:ext>
             </a:extLst>
           </p:cNvPr>
@@ -471,7 +471,7 @@
           <p:cNvPr id="4" name="日付プレースホルダー 3">
             <a:extLst>
               <a:ext uri="{FF2B5EF4-FFF2-40B4-BE49-F238E27FC236}">
-                <a16:creationId xmlns:a16="http://schemas.microsoft.com/office/drawing/2014/main" id="{81F1D456-C6CD-DD82-11CB-B993F776D6D3}"/>
+                <a16:creationId xmlns:a16="http://schemas.microsoft.com/office/drawing/2014/main" id="{9BCE7F3D-F05F-70E0-96E7-10CF15842165}"/>
               </a:ext>
             </a:extLst>
           </p:cNvPr>
@@ -487,7 +487,7 @@
           <a:bodyPr/>
           <a:lstStyle/>
           <a:p>
-            <a:fld id="{1976ACAB-01B6-49D9-BEB0-30BD540AD216}" type="datetimeFigureOut">
+            <a:fld id="{D13547F7-58F2-4860-A5CB-7650EEC5A09F}" type="datetimeFigureOut">
               <a:rPr kumimoji="1" lang="ja-JP" altLang="en-US" smtClean="0"/>
               <a:t>2026/7/30</a:t>
             </a:fld>
@@ -500,7 +500,7 @@
           <p:cNvPr id="5" name="フッター プレースホルダー 4">
             <a:extLst>
               <a:ext uri="{FF2B5EF4-FFF2-40B4-BE49-F238E27FC236}">
-                <a16:creationId xmlns:a16="http://schemas.microsoft.com/office/drawing/2014/main" id="{C6934BF6-181F-E349-7811-D38702A64F14}"/>
+                <a16:creationId xmlns:a16="http://schemas.microsoft.com/office/drawing/2014/main" id="{A58078BA-3980-0C64-2F18-42C81CBA5429}"/>
               </a:ext>
             </a:extLst>
           </p:cNvPr>
@@ -525,7 +525,7 @@
           <p:cNvPr id="6" name="スライド番号プレースホルダー 5">
             <a:extLst>
               <a:ext uri="{FF2B5EF4-FFF2-40B4-BE49-F238E27FC236}">
-                <a16:creationId xmlns:a16="http://schemas.microsoft.com/office/drawing/2014/main" id="{01D9D4E7-2E7F-4B8D-C2B0-5A8D5893124E}"/>
+                <a16:creationId xmlns:a16="http://schemas.microsoft.com/office/drawing/2014/main" id="{71345253-7FD5-A3A0-2664-CAC181B648F2}"/>
               </a:ext>
             </a:extLst>
           </p:cNvPr>
@@ -541,7 +541,7 @@
           <a:bodyPr/>
           <a:lstStyle/>
           <a:p>
-            <a:fld id="{76155B34-8CEE-461C-8ACA-DA9D806EAADE}" type="slidenum">
+            <a:fld id="{2FE1FC7E-FF4E-4E42-A3E1-BBB7562D1753}" type="slidenum">
               <a:rPr kumimoji="1" lang="ja-JP" altLang="en-US" smtClean="0"/>
               <a:t>‹#›</a:t>
             </a:fld>
@@ -552,7 +552,7 @@
     </p:spTree>
     <p:extLst>
       <p:ext uri="{BB962C8B-B14F-4D97-AF65-F5344CB8AC3E}">
-        <p14:creationId xmlns:p14="http://schemas.microsoft.com/office/powerpoint/2010/main" val="3525587777"/>
+        <p14:creationId xmlns:p14="http://schemas.microsoft.com/office/powerpoint/2010/main" val="1883723947"/>
       </p:ext>
     </p:extLst>
   </p:cSld>
@@ -584,7 +584,7 @@
           <p:cNvPr id="2" name="縦書きタイトル 1">
             <a:extLst>
               <a:ext uri="{FF2B5EF4-FFF2-40B4-BE49-F238E27FC236}">
-                <a16:creationId xmlns:a16="http://schemas.microsoft.com/office/drawing/2014/main" id="{60EB2718-4781-3E73-516D-D605F55D669F}"/>
+                <a16:creationId xmlns:a16="http://schemas.microsoft.com/office/drawing/2014/main" id="{134F62F1-45F7-F4A9-29AA-DB7E1B171865}"/>
               </a:ext>
             </a:extLst>
           </p:cNvPr>
@@ -617,7 +617,7 @@
           <p:cNvPr id="3" name="縦書きテキスト プレースホルダー 2">
             <a:extLst>
               <a:ext uri="{FF2B5EF4-FFF2-40B4-BE49-F238E27FC236}">
-                <a16:creationId xmlns:a16="http://schemas.microsoft.com/office/drawing/2014/main" id="{4BE118E2-373D-67A5-2E7D-BAD4EF7A9FDB}"/>
+                <a16:creationId xmlns:a16="http://schemas.microsoft.com/office/drawing/2014/main" id="{67611C6A-D9C4-5120-6D5F-4F2B6A9BBCC3}"/>
               </a:ext>
             </a:extLst>
           </p:cNvPr>
@@ -711,7 +711,7 @@
           <p:cNvPr id="4" name="日付プレースホルダー 3">
             <a:extLst>
               <a:ext uri="{FF2B5EF4-FFF2-40B4-BE49-F238E27FC236}">
-                <a16:creationId xmlns:a16="http://schemas.microsoft.com/office/drawing/2014/main" id="{0EB9649F-7BA2-3B9C-EC07-B3161F2C56FE}"/>
+                <a16:creationId xmlns:a16="http://schemas.microsoft.com/office/drawing/2014/main" id="{E473F670-7527-35E7-7864-F7F47A2D7843}"/>
               </a:ext>
             </a:extLst>
           </p:cNvPr>
@@ -727,7 +727,7 @@
           <a:bodyPr/>
           <a:lstStyle/>
           <a:p>
-            <a:fld id="{1976ACAB-01B6-49D9-BEB0-30BD540AD216}" type="datetimeFigureOut">
+            <a:fld id="{D13547F7-58F2-4860-A5CB-7650EEC5A09F}" type="datetimeFigureOut">
               <a:rPr kumimoji="1" lang="ja-JP" altLang="en-US" smtClean="0"/>
               <a:t>2026/7/30</a:t>
             </a:fld>
@@ -740,7 +740,7 @@
           <p:cNvPr id="5" name="フッター プレースホルダー 4">
             <a:extLst>
               <a:ext uri="{FF2B5EF4-FFF2-40B4-BE49-F238E27FC236}">
-                <a16:creationId xmlns:a16="http://schemas.microsoft.com/office/drawing/2014/main" id="{FC1166D3-EC08-F1DF-48CE-1BB89DECFC87}"/>
+                <a16:creationId xmlns:a16="http://schemas.microsoft.com/office/drawing/2014/main" id="{C67DC14E-9832-F677-718F-4AC7C41F71FA}"/>
               </a:ext>
             </a:extLst>
           </p:cNvPr>
@@ -765,7 +765,7 @@
           <p:cNvPr id="6" name="スライド番号プレースホルダー 5">
             <a:extLst>
               <a:ext uri="{FF2B5EF4-FFF2-40B4-BE49-F238E27FC236}">
-                <a16:creationId xmlns:a16="http://schemas.microsoft.com/office/drawing/2014/main" id="{F7CFDF51-988D-C596-5ADA-8DFB3A4516CA}"/>
+                <a16:creationId xmlns:a16="http://schemas.microsoft.com/office/drawing/2014/main" id="{CF4BC7CB-FA56-AB39-6173-FB9EF8391246}"/>
               </a:ext>
             </a:extLst>
           </p:cNvPr>
@@ -781,7 +781,7 @@
           <a:bodyPr/>
           <a:lstStyle/>
           <a:p>
-            <a:fld id="{76155B34-8CEE-461C-8ACA-DA9D806EAADE}" type="slidenum">
+            <a:fld id="{2FE1FC7E-FF4E-4E42-A3E1-BBB7562D1753}" type="slidenum">
               <a:rPr kumimoji="1" lang="ja-JP" altLang="en-US" smtClean="0"/>
               <a:t>‹#›</a:t>
             </a:fld>
@@ -792,7 +792,7 @@
     </p:spTree>
     <p:extLst>
       <p:ext uri="{BB962C8B-B14F-4D97-AF65-F5344CB8AC3E}">
-        <p14:creationId xmlns:p14="http://schemas.microsoft.com/office/powerpoint/2010/main" val="2802934473"/>
+        <p14:creationId xmlns:p14="http://schemas.microsoft.com/office/powerpoint/2010/main" val="2314179917"/>
       </p:ext>
     </p:extLst>
   </p:cSld>
@@ -824,7 +824,7 @@
           <p:cNvPr id="2" name="タイトル 1">
             <a:extLst>
               <a:ext uri="{FF2B5EF4-FFF2-40B4-BE49-F238E27FC236}">
-                <a16:creationId xmlns:a16="http://schemas.microsoft.com/office/drawing/2014/main" id="{A6018FDF-A5D5-9C4A-8743-915B692D9BFD}"/>
+                <a16:creationId xmlns:a16="http://schemas.microsoft.com/office/drawing/2014/main" id="{117FF998-DAF4-3364-AC72-D01CF8009F07}"/>
               </a:ext>
             </a:extLst>
           </p:cNvPr>
@@ -852,7 +852,7 @@
           <p:cNvPr id="3" name="コンテンツ プレースホルダー 2">
             <a:extLst>
               <a:ext uri="{FF2B5EF4-FFF2-40B4-BE49-F238E27FC236}">
-                <a16:creationId xmlns:a16="http://schemas.microsoft.com/office/drawing/2014/main" id="{EE361AC5-09C2-79C7-487A-895104D09372}"/>
+                <a16:creationId xmlns:a16="http://schemas.microsoft.com/office/drawing/2014/main" id="{3E080FD4-9052-F385-171B-8C242BF15CD5}"/>
               </a:ext>
             </a:extLst>
           </p:cNvPr>
@@ -941,7 +941,7 @@
           <p:cNvPr id="4" name="日付プレースホルダー 3">
             <a:extLst>
               <a:ext uri="{FF2B5EF4-FFF2-40B4-BE49-F238E27FC236}">
-                <a16:creationId xmlns:a16="http://schemas.microsoft.com/office/drawing/2014/main" id="{51570237-3CCC-3CB9-9C63-2B8929D40B45}"/>
+                <a16:creationId xmlns:a16="http://schemas.microsoft.com/office/drawing/2014/main" id="{0C51B7CB-E789-217F-3F8B-20A8895E259C}"/>
               </a:ext>
             </a:extLst>
           </p:cNvPr>
@@ -957,7 +957,7 @@
           <a:bodyPr/>
           <a:lstStyle/>
           <a:p>
-            <a:fld id="{1976ACAB-01B6-49D9-BEB0-30BD540AD216}" type="datetimeFigureOut">
+            <a:fld id="{D13547F7-58F2-4860-A5CB-7650EEC5A09F}" type="datetimeFigureOut">
               <a:rPr kumimoji="1" lang="ja-JP" altLang="en-US" smtClean="0"/>
               <a:t>2026/7/30</a:t>
             </a:fld>
@@ -970,7 +970,7 @@
           <p:cNvPr id="5" name="フッター プレースホルダー 4">
             <a:extLst>
               <a:ext uri="{FF2B5EF4-FFF2-40B4-BE49-F238E27FC236}">
-                <a16:creationId xmlns:a16="http://schemas.microsoft.com/office/drawing/2014/main" id="{A0607FC1-AC12-E2B7-F58B-D686A9E6307E}"/>
+                <a16:creationId xmlns:a16="http://schemas.microsoft.com/office/drawing/2014/main" id="{97A4AF2C-744E-07BE-03C1-ED82B85EEF47}"/>
               </a:ext>
             </a:extLst>
           </p:cNvPr>
@@ -995,7 +995,7 @@
           <p:cNvPr id="6" name="スライド番号プレースホルダー 5">
             <a:extLst>
               <a:ext uri="{FF2B5EF4-FFF2-40B4-BE49-F238E27FC236}">
-                <a16:creationId xmlns:a16="http://schemas.microsoft.com/office/drawing/2014/main" id="{5E8C4883-3FE0-E6E7-4713-AFD081BBEA41}"/>
+                <a16:creationId xmlns:a16="http://schemas.microsoft.com/office/drawing/2014/main" id="{68A6DC14-BE39-C173-C28A-A4FE9E726AE5}"/>
               </a:ext>
             </a:extLst>
           </p:cNvPr>
@@ -1011,7 +1011,7 @@
           <a:bodyPr/>
           <a:lstStyle/>
           <a:p>
-            <a:fld id="{76155B34-8CEE-461C-8ACA-DA9D806EAADE}" type="slidenum">
+            <a:fld id="{2FE1FC7E-FF4E-4E42-A3E1-BBB7562D1753}" type="slidenum">
               <a:rPr kumimoji="1" lang="ja-JP" altLang="en-US" smtClean="0"/>
               <a:t>‹#›</a:t>
             </a:fld>
@@ -1022,7 +1022,7 @@
     </p:spTree>
     <p:extLst>
       <p:ext uri="{BB962C8B-B14F-4D97-AF65-F5344CB8AC3E}">
-        <p14:creationId xmlns:p14="http://schemas.microsoft.com/office/powerpoint/2010/main" val="2875334244"/>
+        <p14:creationId xmlns:p14="http://schemas.microsoft.com/office/powerpoint/2010/main" val="1585209623"/>
       </p:ext>
     </p:extLst>
   </p:cSld>
@@ -1054,7 +1054,7 @@
           <p:cNvPr id="2" name="タイトル 1">
             <a:extLst>
               <a:ext uri="{FF2B5EF4-FFF2-40B4-BE49-F238E27FC236}">
-                <a16:creationId xmlns:a16="http://schemas.microsoft.com/office/drawing/2014/main" id="{43B2FB29-C05E-8530-BC98-F79DD0F59CC8}"/>
+                <a16:creationId xmlns:a16="http://schemas.microsoft.com/office/drawing/2014/main" id="{9BC6499E-3F98-B3E2-1237-0AFA7E8789D3}"/>
               </a:ext>
             </a:extLst>
           </p:cNvPr>
@@ -1091,7 +1091,7 @@
           <p:cNvPr id="3" name="テキスト プレースホルダー 2">
             <a:extLst>
               <a:ext uri="{FF2B5EF4-FFF2-40B4-BE49-F238E27FC236}">
-                <a16:creationId xmlns:a16="http://schemas.microsoft.com/office/drawing/2014/main" id="{3D1290A7-D240-6CE6-9B90-66173D53FA1D}"/>
+                <a16:creationId xmlns:a16="http://schemas.microsoft.com/office/drawing/2014/main" id="{7FBE16BE-27DA-5976-2E20-0E5ACF723F3D}"/>
               </a:ext>
             </a:extLst>
           </p:cNvPr>
@@ -1216,7 +1216,7 @@
           <p:cNvPr id="4" name="日付プレースホルダー 3">
             <a:extLst>
               <a:ext uri="{FF2B5EF4-FFF2-40B4-BE49-F238E27FC236}">
-                <a16:creationId xmlns:a16="http://schemas.microsoft.com/office/drawing/2014/main" id="{CE1F2889-0F1A-7EC1-870C-1E92E58F6254}"/>
+                <a16:creationId xmlns:a16="http://schemas.microsoft.com/office/drawing/2014/main" id="{977ABE2D-18CC-AC46-B18D-1F8C62E76C8E}"/>
               </a:ext>
             </a:extLst>
           </p:cNvPr>
@@ -1232,7 +1232,7 @@
           <a:bodyPr/>
           <a:lstStyle/>
           <a:p>
-            <a:fld id="{1976ACAB-01B6-49D9-BEB0-30BD540AD216}" type="datetimeFigureOut">
+            <a:fld id="{D13547F7-58F2-4860-A5CB-7650EEC5A09F}" type="datetimeFigureOut">
               <a:rPr kumimoji="1" lang="ja-JP" altLang="en-US" smtClean="0"/>
               <a:t>2026/7/30</a:t>
             </a:fld>
@@ -1245,7 +1245,7 @@
           <p:cNvPr id="5" name="フッター プレースホルダー 4">
             <a:extLst>
               <a:ext uri="{FF2B5EF4-FFF2-40B4-BE49-F238E27FC236}">
-                <a16:creationId xmlns:a16="http://schemas.microsoft.com/office/drawing/2014/main" id="{CF5B0964-7C09-D25A-D227-0902A64E30C3}"/>
+                <a16:creationId xmlns:a16="http://schemas.microsoft.com/office/drawing/2014/main" id="{2CA053CA-1804-E8DD-27AA-550C1316FCB2}"/>
               </a:ext>
             </a:extLst>
           </p:cNvPr>
@@ -1270,7 +1270,7 @@
           <p:cNvPr id="6" name="スライド番号プレースホルダー 5">
             <a:extLst>
               <a:ext uri="{FF2B5EF4-FFF2-40B4-BE49-F238E27FC236}">
-                <a16:creationId xmlns:a16="http://schemas.microsoft.com/office/drawing/2014/main" id="{8B002F74-D78D-0935-26AD-DD6D978B0482}"/>
+                <a16:creationId xmlns:a16="http://schemas.microsoft.com/office/drawing/2014/main" id="{1CDDD2FF-C356-24A9-2FC3-86FEAD17C497}"/>
               </a:ext>
             </a:extLst>
           </p:cNvPr>
@@ -1286,7 +1286,7 @@
           <a:bodyPr/>
           <a:lstStyle/>
           <a:p>
-            <a:fld id="{76155B34-8CEE-461C-8ACA-DA9D806EAADE}" type="slidenum">
+            <a:fld id="{2FE1FC7E-FF4E-4E42-A3E1-BBB7562D1753}" type="slidenum">
               <a:rPr kumimoji="1" lang="ja-JP" altLang="en-US" smtClean="0"/>
               <a:t>‹#›</a:t>
             </a:fld>
@@ -1297,7 +1297,7 @@
     </p:spTree>
     <p:extLst>
       <p:ext uri="{BB962C8B-B14F-4D97-AF65-F5344CB8AC3E}">
-        <p14:creationId xmlns:p14="http://schemas.microsoft.com/office/powerpoint/2010/main" val="1209671698"/>
+        <p14:creationId xmlns:p14="http://schemas.microsoft.com/office/powerpoint/2010/main" val="1303018170"/>
       </p:ext>
     </p:extLst>
   </p:cSld>
@@ -1329,7 +1329,7 @@
           <p:cNvPr id="2" name="タイトル 1">
             <a:extLst>
               <a:ext uri="{FF2B5EF4-FFF2-40B4-BE49-F238E27FC236}">
-                <a16:creationId xmlns:a16="http://schemas.microsoft.com/office/drawing/2014/main" id="{432DF3AF-21C3-77AB-D2B2-448E896372BB}"/>
+                <a16:creationId xmlns:a16="http://schemas.microsoft.com/office/drawing/2014/main" id="{3D5159A1-B536-B74B-1DEE-1EBC010AA12B}"/>
               </a:ext>
             </a:extLst>
           </p:cNvPr>
@@ -1357,7 +1357,7 @@
           <p:cNvPr id="3" name="コンテンツ プレースホルダー 2">
             <a:extLst>
               <a:ext uri="{FF2B5EF4-FFF2-40B4-BE49-F238E27FC236}">
-                <a16:creationId xmlns:a16="http://schemas.microsoft.com/office/drawing/2014/main" id="{5D1DCE91-4AEC-4E70-184A-54D18636775C}"/>
+                <a16:creationId xmlns:a16="http://schemas.microsoft.com/office/drawing/2014/main" id="{CCACD8FC-C77E-684D-DB43-C8B88B4A9870}"/>
               </a:ext>
             </a:extLst>
           </p:cNvPr>
@@ -1451,7 +1451,7 @@
           <p:cNvPr id="4" name="コンテンツ プレースホルダー 3">
             <a:extLst>
               <a:ext uri="{FF2B5EF4-FFF2-40B4-BE49-F238E27FC236}">
-                <a16:creationId xmlns:a16="http://schemas.microsoft.com/office/drawing/2014/main" id="{8483C409-C510-A18B-F108-113050B42FC9}"/>
+                <a16:creationId xmlns:a16="http://schemas.microsoft.com/office/drawing/2014/main" id="{44E5EEA0-3253-FBA9-D1F6-C0678B5EB56C}"/>
               </a:ext>
             </a:extLst>
           </p:cNvPr>
@@ -1545,7 +1545,7 @@
           <p:cNvPr id="5" name="日付プレースホルダー 4">
             <a:extLst>
               <a:ext uri="{FF2B5EF4-FFF2-40B4-BE49-F238E27FC236}">
-                <a16:creationId xmlns:a16="http://schemas.microsoft.com/office/drawing/2014/main" id="{8F0A1D01-9435-4CDE-BEE8-512A210B9E68}"/>
+                <a16:creationId xmlns:a16="http://schemas.microsoft.com/office/drawing/2014/main" id="{83C136F7-2D55-4252-6A2D-352C8D519E1D}"/>
               </a:ext>
             </a:extLst>
           </p:cNvPr>
@@ -1561,7 +1561,7 @@
           <a:bodyPr/>
           <a:lstStyle/>
           <a:p>
-            <a:fld id="{1976ACAB-01B6-49D9-BEB0-30BD540AD216}" type="datetimeFigureOut">
+            <a:fld id="{D13547F7-58F2-4860-A5CB-7650EEC5A09F}" type="datetimeFigureOut">
               <a:rPr kumimoji="1" lang="ja-JP" altLang="en-US" smtClean="0"/>
               <a:t>2026/7/30</a:t>
             </a:fld>
@@ -1574,7 +1574,7 @@
           <p:cNvPr id="6" name="フッター プレースホルダー 5">
             <a:extLst>
               <a:ext uri="{FF2B5EF4-FFF2-40B4-BE49-F238E27FC236}">
-                <a16:creationId xmlns:a16="http://schemas.microsoft.com/office/drawing/2014/main" id="{2D1235CA-49E1-33BF-D63D-B4DEBC590596}"/>
+                <a16:creationId xmlns:a16="http://schemas.microsoft.com/office/drawing/2014/main" id="{8B08559D-C27D-B2EF-EB29-272F3385AFAE}"/>
               </a:ext>
             </a:extLst>
           </p:cNvPr>
@@ -1599,7 +1599,7 @@
           <p:cNvPr id="7" name="スライド番号プレースホルダー 6">
             <a:extLst>
               <a:ext uri="{FF2B5EF4-FFF2-40B4-BE49-F238E27FC236}">
-                <a16:creationId xmlns:a16="http://schemas.microsoft.com/office/drawing/2014/main" id="{01B20893-4E8D-DD7A-839F-CAF652B1DB1B}"/>
+                <a16:creationId xmlns:a16="http://schemas.microsoft.com/office/drawing/2014/main" id="{2C240FDA-07BB-16A2-CB0B-EC87B2938381}"/>
               </a:ext>
             </a:extLst>
           </p:cNvPr>
@@ -1615,7 +1615,7 @@
           <a:bodyPr/>
           <a:lstStyle/>
           <a:p>
-            <a:fld id="{76155B34-8CEE-461C-8ACA-DA9D806EAADE}" type="slidenum">
+            <a:fld id="{2FE1FC7E-FF4E-4E42-A3E1-BBB7562D1753}" type="slidenum">
               <a:rPr kumimoji="1" lang="ja-JP" altLang="en-US" smtClean="0"/>
               <a:t>‹#›</a:t>
             </a:fld>
@@ -1626,7 +1626,7 @@
     </p:spTree>
     <p:extLst>
       <p:ext uri="{BB962C8B-B14F-4D97-AF65-F5344CB8AC3E}">
-        <p14:creationId xmlns:p14="http://schemas.microsoft.com/office/powerpoint/2010/main" val="2829099587"/>
+        <p14:creationId xmlns:p14="http://schemas.microsoft.com/office/powerpoint/2010/main" val="2492712829"/>
       </p:ext>
     </p:extLst>
   </p:cSld>
@@ -1658,7 +1658,7 @@
           <p:cNvPr id="2" name="タイトル 1">
             <a:extLst>
               <a:ext uri="{FF2B5EF4-FFF2-40B4-BE49-F238E27FC236}">
-                <a16:creationId xmlns:a16="http://schemas.microsoft.com/office/drawing/2014/main" id="{F1FD2DAB-01D0-DE6E-1B36-7FD7C77B7863}"/>
+                <a16:creationId xmlns:a16="http://schemas.microsoft.com/office/drawing/2014/main" id="{6CADA749-4425-A94E-FB77-8AE6182EB98C}"/>
               </a:ext>
             </a:extLst>
           </p:cNvPr>
@@ -1691,7 +1691,7 @@
           <p:cNvPr id="3" name="テキスト プレースホルダー 2">
             <a:extLst>
               <a:ext uri="{FF2B5EF4-FFF2-40B4-BE49-F238E27FC236}">
-                <a16:creationId xmlns:a16="http://schemas.microsoft.com/office/drawing/2014/main" id="{C70415E9-5678-EE31-4D6B-9C0014027A7E}"/>
+                <a16:creationId xmlns:a16="http://schemas.microsoft.com/office/drawing/2014/main" id="{FC5558B5-EA6C-4478-6E42-F5860E165FC7}"/>
               </a:ext>
             </a:extLst>
           </p:cNvPr>
@@ -1762,7 +1762,7 @@
           <p:cNvPr id="4" name="コンテンツ プレースホルダー 3">
             <a:extLst>
               <a:ext uri="{FF2B5EF4-FFF2-40B4-BE49-F238E27FC236}">
-                <a16:creationId xmlns:a16="http://schemas.microsoft.com/office/drawing/2014/main" id="{3ACC49EE-BCFA-892F-3785-AE317806ECB1}"/>
+                <a16:creationId xmlns:a16="http://schemas.microsoft.com/office/drawing/2014/main" id="{3B5080EB-B7BB-02C6-E5A9-01C13862D389}"/>
               </a:ext>
             </a:extLst>
           </p:cNvPr>
@@ -1856,7 +1856,7 @@
           <p:cNvPr id="5" name="テキスト プレースホルダー 4">
             <a:extLst>
               <a:ext uri="{FF2B5EF4-FFF2-40B4-BE49-F238E27FC236}">
-                <a16:creationId xmlns:a16="http://schemas.microsoft.com/office/drawing/2014/main" id="{0A4D9893-66C8-848E-8941-27E4F203F2F2}"/>
+                <a16:creationId xmlns:a16="http://schemas.microsoft.com/office/drawing/2014/main" id="{6D99B625-55DD-42B7-6EF4-892A0D512125}"/>
               </a:ext>
             </a:extLst>
           </p:cNvPr>
@@ -1927,7 +1927,7 @@
           <p:cNvPr id="6" name="コンテンツ プレースホルダー 5">
             <a:extLst>
               <a:ext uri="{FF2B5EF4-FFF2-40B4-BE49-F238E27FC236}">
-                <a16:creationId xmlns:a16="http://schemas.microsoft.com/office/drawing/2014/main" id="{D9FBC427-9C55-F001-C74F-9DEE63626930}"/>
+                <a16:creationId xmlns:a16="http://schemas.microsoft.com/office/drawing/2014/main" id="{8D59F34B-C0F9-178A-9485-BD37D499C881}"/>
               </a:ext>
             </a:extLst>
           </p:cNvPr>
@@ -2021,7 +2021,7 @@
           <p:cNvPr id="7" name="日付プレースホルダー 6">
             <a:extLst>
               <a:ext uri="{FF2B5EF4-FFF2-40B4-BE49-F238E27FC236}">
-                <a16:creationId xmlns:a16="http://schemas.microsoft.com/office/drawing/2014/main" id="{A579E5A2-F0B1-B03C-BCE8-40E8FF26BA97}"/>
+                <a16:creationId xmlns:a16="http://schemas.microsoft.com/office/drawing/2014/main" id="{FE93BAB0-A5A6-890F-BE7D-E7E74E763A17}"/>
               </a:ext>
             </a:extLst>
           </p:cNvPr>
@@ -2037,7 +2037,7 @@
           <a:bodyPr/>
           <a:lstStyle/>
           <a:p>
-            <a:fld id="{1976ACAB-01B6-49D9-BEB0-30BD540AD216}" type="datetimeFigureOut">
+            <a:fld id="{D13547F7-58F2-4860-A5CB-7650EEC5A09F}" type="datetimeFigureOut">
               <a:rPr kumimoji="1" lang="ja-JP" altLang="en-US" smtClean="0"/>
               <a:t>2026/7/30</a:t>
             </a:fld>
@@ -2050,7 +2050,7 @@
           <p:cNvPr id="8" name="フッター プレースホルダー 7">
             <a:extLst>
               <a:ext uri="{FF2B5EF4-FFF2-40B4-BE49-F238E27FC236}">
-                <a16:creationId xmlns:a16="http://schemas.microsoft.com/office/drawing/2014/main" id="{56DC60EE-E251-84C4-426B-1329EDDB9E58}"/>
+                <a16:creationId xmlns:a16="http://schemas.microsoft.com/office/drawing/2014/main" id="{5586342A-C493-EE13-266A-17F57D842772}"/>
               </a:ext>
             </a:extLst>
           </p:cNvPr>
@@ -2075,7 +2075,7 @@
           <p:cNvPr id="9" name="スライド番号プレースホルダー 8">
             <a:extLst>
               <a:ext uri="{FF2B5EF4-FFF2-40B4-BE49-F238E27FC236}">
-                <a16:creationId xmlns:a16="http://schemas.microsoft.com/office/drawing/2014/main" id="{B8C8D429-AA75-BBF2-5212-99A1AD39887D}"/>
+                <a16:creationId xmlns:a16="http://schemas.microsoft.com/office/drawing/2014/main" id="{C04C9359-81DD-8006-5781-5BDE317ACB63}"/>
               </a:ext>
             </a:extLst>
           </p:cNvPr>
@@ -2091,7 +2091,7 @@
           <a:bodyPr/>
           <a:lstStyle/>
           <a:p>
-            <a:fld id="{76155B34-8CEE-461C-8ACA-DA9D806EAADE}" type="slidenum">
+            <a:fld id="{2FE1FC7E-FF4E-4E42-A3E1-BBB7562D1753}" type="slidenum">
               <a:rPr kumimoji="1" lang="ja-JP" altLang="en-US" smtClean="0"/>
               <a:t>‹#›</a:t>
             </a:fld>
@@ -2102,7 +2102,7 @@
     </p:spTree>
     <p:extLst>
       <p:ext uri="{BB962C8B-B14F-4D97-AF65-F5344CB8AC3E}">
-        <p14:creationId xmlns:p14="http://schemas.microsoft.com/office/powerpoint/2010/main" val="2818825965"/>
+        <p14:creationId xmlns:p14="http://schemas.microsoft.com/office/powerpoint/2010/main" val="3334595212"/>
       </p:ext>
     </p:extLst>
   </p:cSld>
@@ -2134,7 +2134,7 @@
           <p:cNvPr id="2" name="タイトル 1">
             <a:extLst>
               <a:ext uri="{FF2B5EF4-FFF2-40B4-BE49-F238E27FC236}">
-                <a16:creationId xmlns:a16="http://schemas.microsoft.com/office/drawing/2014/main" id="{8E747C6D-910D-8D57-FC8C-C77F8ACA93A0}"/>
+                <a16:creationId xmlns:a16="http://schemas.microsoft.com/office/drawing/2014/main" id="{CBE45DB9-DABA-6478-E673-CFCF808F0717}"/>
               </a:ext>
             </a:extLst>
           </p:cNvPr>
@@ -2162,7 +2162,7 @@
           <p:cNvPr id="3" name="日付プレースホルダー 2">
             <a:extLst>
               <a:ext uri="{FF2B5EF4-FFF2-40B4-BE49-F238E27FC236}">
-                <a16:creationId xmlns:a16="http://schemas.microsoft.com/office/drawing/2014/main" id="{20F239A4-5718-B04A-D221-3FE6ED3EED92}"/>
+                <a16:creationId xmlns:a16="http://schemas.microsoft.com/office/drawing/2014/main" id="{3BC2E272-6066-BA26-1499-E2DABF65C84F}"/>
               </a:ext>
             </a:extLst>
           </p:cNvPr>
@@ -2178,7 +2178,7 @@
           <a:bodyPr/>
           <a:lstStyle/>
           <a:p>
-            <a:fld id="{1976ACAB-01B6-49D9-BEB0-30BD540AD216}" type="datetimeFigureOut">
+            <a:fld id="{D13547F7-58F2-4860-A5CB-7650EEC5A09F}" type="datetimeFigureOut">
               <a:rPr kumimoji="1" lang="ja-JP" altLang="en-US" smtClean="0"/>
               <a:t>2026/7/30</a:t>
             </a:fld>
@@ -2191,7 +2191,7 @@
           <p:cNvPr id="4" name="フッター プレースホルダー 3">
             <a:extLst>
               <a:ext uri="{FF2B5EF4-FFF2-40B4-BE49-F238E27FC236}">
-                <a16:creationId xmlns:a16="http://schemas.microsoft.com/office/drawing/2014/main" id="{BAAC8A4C-83FC-53B3-460F-902777758505}"/>
+                <a16:creationId xmlns:a16="http://schemas.microsoft.com/office/drawing/2014/main" id="{B9A2A954-558C-4C8A-B419-4AAA406A54B8}"/>
               </a:ext>
             </a:extLst>
           </p:cNvPr>
@@ -2216,7 +2216,7 @@
           <p:cNvPr id="5" name="スライド番号プレースホルダー 4">
             <a:extLst>
               <a:ext uri="{FF2B5EF4-FFF2-40B4-BE49-F238E27FC236}">
-                <a16:creationId xmlns:a16="http://schemas.microsoft.com/office/drawing/2014/main" id="{C652D7EA-CB78-F0AD-13FB-56C61A9D9595}"/>
+                <a16:creationId xmlns:a16="http://schemas.microsoft.com/office/drawing/2014/main" id="{485F1CE6-88A4-E253-6E29-4FC24D036BB4}"/>
               </a:ext>
             </a:extLst>
           </p:cNvPr>
@@ -2232,7 +2232,7 @@
           <a:bodyPr/>
           <a:lstStyle/>
           <a:p>
-            <a:fld id="{76155B34-8CEE-461C-8ACA-DA9D806EAADE}" type="slidenum">
+            <a:fld id="{2FE1FC7E-FF4E-4E42-A3E1-BBB7562D1753}" type="slidenum">
               <a:rPr kumimoji="1" lang="ja-JP" altLang="en-US" smtClean="0"/>
               <a:t>‹#›</a:t>
             </a:fld>
@@ -2243,7 +2243,7 @@
     </p:spTree>
     <p:extLst>
       <p:ext uri="{BB962C8B-B14F-4D97-AF65-F5344CB8AC3E}">
-        <p14:creationId xmlns:p14="http://schemas.microsoft.com/office/powerpoint/2010/main" val="822396697"/>
+        <p14:creationId xmlns:p14="http://schemas.microsoft.com/office/powerpoint/2010/main" val="4140322717"/>
       </p:ext>
     </p:extLst>
   </p:cSld>
@@ -2275,7 +2275,7 @@
           <p:cNvPr id="2" name="日付プレースホルダー 1">
             <a:extLst>
               <a:ext uri="{FF2B5EF4-FFF2-40B4-BE49-F238E27FC236}">
-                <a16:creationId xmlns:a16="http://schemas.microsoft.com/office/drawing/2014/main" id="{35597EF4-1FDE-EB72-1874-5CEFC1824D8C}"/>
+                <a16:creationId xmlns:a16="http://schemas.microsoft.com/office/drawing/2014/main" id="{509ADD03-8EC6-E402-F291-7177439D70D4}"/>
               </a:ext>
             </a:extLst>
           </p:cNvPr>
@@ -2291,7 +2291,7 @@
           <a:bodyPr/>
           <a:lstStyle/>
           <a:p>
-            <a:fld id="{1976ACAB-01B6-49D9-BEB0-30BD540AD216}" type="datetimeFigureOut">
+            <a:fld id="{D13547F7-58F2-4860-A5CB-7650EEC5A09F}" type="datetimeFigureOut">
               <a:rPr kumimoji="1" lang="ja-JP" altLang="en-US" smtClean="0"/>
               <a:t>2026/7/30</a:t>
             </a:fld>
@@ -2304,7 +2304,7 @@
           <p:cNvPr id="3" name="フッター プレースホルダー 2">
             <a:extLst>
               <a:ext uri="{FF2B5EF4-FFF2-40B4-BE49-F238E27FC236}">
-                <a16:creationId xmlns:a16="http://schemas.microsoft.com/office/drawing/2014/main" id="{A22C5499-8C76-489E-213D-ED90A55454D2}"/>
+                <a16:creationId xmlns:a16="http://schemas.microsoft.com/office/drawing/2014/main" id="{25E93427-B7F7-A625-C017-BDFEDC9C87ED}"/>
               </a:ext>
             </a:extLst>
           </p:cNvPr>
@@ -2329,7 +2329,7 @@
           <p:cNvPr id="4" name="スライド番号プレースホルダー 3">
             <a:extLst>
               <a:ext uri="{FF2B5EF4-FFF2-40B4-BE49-F238E27FC236}">
-                <a16:creationId xmlns:a16="http://schemas.microsoft.com/office/drawing/2014/main" id="{272EBA5D-92DC-C394-9CF9-3BED1CD73375}"/>
+                <a16:creationId xmlns:a16="http://schemas.microsoft.com/office/drawing/2014/main" id="{BAF5A331-CE54-71C3-C7F7-A489CAD854AA}"/>
               </a:ext>
             </a:extLst>
           </p:cNvPr>
@@ -2345,7 +2345,7 @@
           <a:bodyPr/>
           <a:lstStyle/>
           <a:p>
-            <a:fld id="{76155B34-8CEE-461C-8ACA-DA9D806EAADE}" type="slidenum">
+            <a:fld id="{2FE1FC7E-FF4E-4E42-A3E1-BBB7562D1753}" type="slidenum">
               <a:rPr kumimoji="1" lang="ja-JP" altLang="en-US" smtClean="0"/>
               <a:t>‹#›</a:t>
             </a:fld>
@@ -2356,7 +2356,7 @@
     </p:spTree>
     <p:extLst>
       <p:ext uri="{BB962C8B-B14F-4D97-AF65-F5344CB8AC3E}">
-        <p14:creationId xmlns:p14="http://schemas.microsoft.com/office/powerpoint/2010/main" val="300455350"/>
+        <p14:creationId xmlns:p14="http://schemas.microsoft.com/office/powerpoint/2010/main" val="3410568159"/>
       </p:ext>
     </p:extLst>
   </p:cSld>
@@ -2388,7 +2388,7 @@
           <p:cNvPr id="2" name="タイトル 1">
             <a:extLst>
               <a:ext uri="{FF2B5EF4-FFF2-40B4-BE49-F238E27FC236}">
-                <a16:creationId xmlns:a16="http://schemas.microsoft.com/office/drawing/2014/main" id="{22DB5A96-8E95-DE16-AF46-936639E5D20A}"/>
+                <a16:creationId xmlns:a16="http://schemas.microsoft.com/office/drawing/2014/main" id="{3A38F764-BF24-E059-6B41-9DF834A70D33}"/>
               </a:ext>
             </a:extLst>
           </p:cNvPr>
@@ -2425,7 +2425,7 @@
           <p:cNvPr id="3" name="コンテンツ プレースホルダー 2">
             <a:extLst>
               <a:ext uri="{FF2B5EF4-FFF2-40B4-BE49-F238E27FC236}">
-                <a16:creationId xmlns:a16="http://schemas.microsoft.com/office/drawing/2014/main" id="{4956ECE2-5D6B-F831-213C-3FE35880B651}"/>
+                <a16:creationId xmlns:a16="http://schemas.microsoft.com/office/drawing/2014/main" id="{4EB6B1A2-BF9E-5C6B-23F7-0E81DA2C69E0}"/>
               </a:ext>
             </a:extLst>
           </p:cNvPr>
@@ -2547,7 +2547,7 @@
           <p:cNvPr id="4" name="テキスト プレースホルダー 3">
             <a:extLst>
               <a:ext uri="{FF2B5EF4-FFF2-40B4-BE49-F238E27FC236}">
-                <a16:creationId xmlns:a16="http://schemas.microsoft.com/office/drawing/2014/main" id="{E29C7BF4-9C61-B0CF-A7E8-0634E43703A8}"/>
+                <a16:creationId xmlns:a16="http://schemas.microsoft.com/office/drawing/2014/main" id="{4B06D44F-96AD-2406-C6A7-44ABBD94BB86}"/>
               </a:ext>
             </a:extLst>
           </p:cNvPr>
@@ -2618,7 +2618,7 @@
           <p:cNvPr id="5" name="日付プレースホルダー 4">
             <a:extLst>
               <a:ext uri="{FF2B5EF4-FFF2-40B4-BE49-F238E27FC236}">
-                <a16:creationId xmlns:a16="http://schemas.microsoft.com/office/drawing/2014/main" id="{984E5AFA-923E-4D03-CD60-A025A8D615B5}"/>
+                <a16:creationId xmlns:a16="http://schemas.microsoft.com/office/drawing/2014/main" id="{8224F571-0FAE-1D2F-03FE-7FEFF16277A2}"/>
               </a:ext>
             </a:extLst>
           </p:cNvPr>
@@ -2634,7 +2634,7 @@
           <a:bodyPr/>
           <a:lstStyle/>
           <a:p>
-            <a:fld id="{1976ACAB-01B6-49D9-BEB0-30BD540AD216}" type="datetimeFigureOut">
+            <a:fld id="{D13547F7-58F2-4860-A5CB-7650EEC5A09F}" type="datetimeFigureOut">
               <a:rPr kumimoji="1" lang="ja-JP" altLang="en-US" smtClean="0"/>
               <a:t>2026/7/30</a:t>
             </a:fld>
@@ -2647,7 +2647,7 @@
           <p:cNvPr id="6" name="フッター プレースホルダー 5">
             <a:extLst>
               <a:ext uri="{FF2B5EF4-FFF2-40B4-BE49-F238E27FC236}">
-                <a16:creationId xmlns:a16="http://schemas.microsoft.com/office/drawing/2014/main" id="{A1AF589F-6C12-E9C2-BCB9-88CAD29A12D0}"/>
+                <a16:creationId xmlns:a16="http://schemas.microsoft.com/office/drawing/2014/main" id="{715DC3A0-C3EF-0A1B-5AE8-A1E192B91AB9}"/>
               </a:ext>
             </a:extLst>
           </p:cNvPr>
@@ -2672,7 +2672,7 @@
           <p:cNvPr id="7" name="スライド番号プレースホルダー 6">
             <a:extLst>
               <a:ext uri="{FF2B5EF4-FFF2-40B4-BE49-F238E27FC236}">
-                <a16:creationId xmlns:a16="http://schemas.microsoft.com/office/drawing/2014/main" id="{1D0D19D8-5C42-BAB3-3CCF-CB0BC7E34B04}"/>
+                <a16:creationId xmlns:a16="http://schemas.microsoft.com/office/drawing/2014/main" id="{8437B2BB-E6B3-CF53-1253-1A0FA8CDD843}"/>
               </a:ext>
             </a:extLst>
           </p:cNvPr>
@@ -2688,7 +2688,7 @@
           <a:bodyPr/>
           <a:lstStyle/>
           <a:p>
-            <a:fld id="{76155B34-8CEE-461C-8ACA-DA9D806EAADE}" type="slidenum">
+            <a:fld id="{2FE1FC7E-FF4E-4E42-A3E1-BBB7562D1753}" type="slidenum">
               <a:rPr kumimoji="1" lang="ja-JP" altLang="en-US" smtClean="0"/>
               <a:t>‹#›</a:t>
             </a:fld>
@@ -2699,7 +2699,7 @@
     </p:spTree>
     <p:extLst>
       <p:ext uri="{BB962C8B-B14F-4D97-AF65-F5344CB8AC3E}">
-        <p14:creationId xmlns:p14="http://schemas.microsoft.com/office/powerpoint/2010/main" val="2078127922"/>
+        <p14:creationId xmlns:p14="http://schemas.microsoft.com/office/powerpoint/2010/main" val="3797930623"/>
       </p:ext>
     </p:extLst>
   </p:cSld>
@@ -2731,7 +2731,7 @@
           <p:cNvPr id="2" name="タイトル 1">
             <a:extLst>
               <a:ext uri="{FF2B5EF4-FFF2-40B4-BE49-F238E27FC236}">
-                <a16:creationId xmlns:a16="http://schemas.microsoft.com/office/drawing/2014/main" id="{DD5D9559-99A0-9AB0-47AF-8A2C28D495B1}"/>
+                <a16:creationId xmlns:a16="http://schemas.microsoft.com/office/drawing/2014/main" id="{D793795A-C1A7-50B4-A873-8E3E0D11F098}"/>
               </a:ext>
             </a:extLst>
           </p:cNvPr>
@@ -2768,7 +2768,7 @@
           <p:cNvPr id="3" name="図プレースホルダー 2">
             <a:extLst>
               <a:ext uri="{FF2B5EF4-FFF2-40B4-BE49-F238E27FC236}">
-                <a16:creationId xmlns:a16="http://schemas.microsoft.com/office/drawing/2014/main" id="{056AA7AB-D5C3-9C21-E36C-A5C728DD607A}"/>
+                <a16:creationId xmlns:a16="http://schemas.microsoft.com/office/drawing/2014/main" id="{F9F5D626-DBE1-8FF2-9534-50D75324D961}"/>
               </a:ext>
             </a:extLst>
           </p:cNvPr>
@@ -2835,7 +2835,7 @@
           <p:cNvPr id="4" name="テキスト プレースホルダー 3">
             <a:extLst>
               <a:ext uri="{FF2B5EF4-FFF2-40B4-BE49-F238E27FC236}">
-                <a16:creationId xmlns:a16="http://schemas.microsoft.com/office/drawing/2014/main" id="{52F7ADF1-4526-B2DD-5453-6B5E92DCF81E}"/>
+                <a16:creationId xmlns:a16="http://schemas.microsoft.com/office/drawing/2014/main" id="{22C53021-FF25-CF14-B768-3CD613F87124}"/>
               </a:ext>
             </a:extLst>
           </p:cNvPr>
@@ -2906,7 +2906,7 @@
           <p:cNvPr id="5" name="日付プレースホルダー 4">
             <a:extLst>
               <a:ext uri="{FF2B5EF4-FFF2-40B4-BE49-F238E27FC236}">
-                <a16:creationId xmlns:a16="http://schemas.microsoft.com/office/drawing/2014/main" id="{1A6884BF-8C68-E16D-F57C-2D56155F501F}"/>
+                <a16:creationId xmlns:a16="http://schemas.microsoft.com/office/drawing/2014/main" id="{F2BF0EAF-A9AD-3685-34AB-F1F0C8569CA3}"/>
               </a:ext>
             </a:extLst>
           </p:cNvPr>
@@ -2922,7 +2922,7 @@
           <a:bodyPr/>
           <a:lstStyle/>
           <a:p>
-            <a:fld id="{1976ACAB-01B6-49D9-BEB0-30BD540AD216}" type="datetimeFigureOut">
+            <a:fld id="{D13547F7-58F2-4860-A5CB-7650EEC5A09F}" type="datetimeFigureOut">
               <a:rPr kumimoji="1" lang="ja-JP" altLang="en-US" smtClean="0"/>
               <a:t>2026/7/30</a:t>
             </a:fld>
@@ -2935,7 +2935,7 @@
           <p:cNvPr id="6" name="フッター プレースホルダー 5">
             <a:extLst>
               <a:ext uri="{FF2B5EF4-FFF2-40B4-BE49-F238E27FC236}">
-                <a16:creationId xmlns:a16="http://schemas.microsoft.com/office/drawing/2014/main" id="{4C404664-4D02-1744-77DB-959FAAB1E0AD}"/>
+                <a16:creationId xmlns:a16="http://schemas.microsoft.com/office/drawing/2014/main" id="{2CF97CD8-DFC6-8938-B87B-7C5298F8FA9B}"/>
               </a:ext>
             </a:extLst>
           </p:cNvPr>
@@ -2960,7 +2960,7 @@
           <p:cNvPr id="7" name="スライド番号プレースホルダー 6">
             <a:extLst>
               <a:ext uri="{FF2B5EF4-FFF2-40B4-BE49-F238E27FC236}">
-                <a16:creationId xmlns:a16="http://schemas.microsoft.com/office/drawing/2014/main" id="{423D34F1-3717-2B55-B065-F1864F4DC2D5}"/>
+                <a16:creationId xmlns:a16="http://schemas.microsoft.com/office/drawing/2014/main" id="{364571DB-A014-77B7-1681-D39FE8646B71}"/>
               </a:ext>
             </a:extLst>
           </p:cNvPr>
@@ -2976,7 +2976,7 @@
           <a:bodyPr/>
           <a:lstStyle/>
           <a:p>
-            <a:fld id="{76155B34-8CEE-461C-8ACA-DA9D806EAADE}" type="slidenum">
+            <a:fld id="{2FE1FC7E-FF4E-4E42-A3E1-BBB7562D1753}" type="slidenum">
               <a:rPr kumimoji="1" lang="ja-JP" altLang="en-US" smtClean="0"/>
               <a:t>‹#›</a:t>
             </a:fld>
@@ -2987,7 +2987,7 @@
     </p:spTree>
     <p:extLst>
       <p:ext uri="{BB962C8B-B14F-4D97-AF65-F5344CB8AC3E}">
-        <p14:creationId xmlns:p14="http://schemas.microsoft.com/office/powerpoint/2010/main" val="696370794"/>
+        <p14:creationId xmlns:p14="http://schemas.microsoft.com/office/powerpoint/2010/main" val="537525729"/>
       </p:ext>
     </p:extLst>
   </p:cSld>
@@ -3024,7 +3024,7 @@
           <p:cNvPr id="2" name="タイトル プレースホルダー 1">
             <a:extLst>
               <a:ext uri="{FF2B5EF4-FFF2-40B4-BE49-F238E27FC236}">
-                <a16:creationId xmlns:a16="http://schemas.microsoft.com/office/drawing/2014/main" id="{5D3846E0-E0A0-8E52-BFA2-7EF874BEC539}"/>
+                <a16:creationId xmlns:a16="http://schemas.microsoft.com/office/drawing/2014/main" id="{D7756667-EA16-796B-B328-9F7F5BA6F835}"/>
               </a:ext>
             </a:extLst>
           </p:cNvPr>
@@ -3062,7 +3062,7 @@
           <p:cNvPr id="3" name="テキスト プレースホルダー 2">
             <a:extLst>
               <a:ext uri="{FF2B5EF4-FFF2-40B4-BE49-F238E27FC236}">
-                <a16:creationId xmlns:a16="http://schemas.microsoft.com/office/drawing/2014/main" id="{E2E348FA-7E89-6BBC-C9D2-F56E8D059194}"/>
+                <a16:creationId xmlns:a16="http://schemas.microsoft.com/office/drawing/2014/main" id="{039F728B-DA5B-0622-A41C-9B7207D2DAE5}"/>
               </a:ext>
             </a:extLst>
           </p:cNvPr>
@@ -3161,7 +3161,7 @@
           <p:cNvPr id="4" name="日付プレースホルダー 3">
             <a:extLst>
               <a:ext uri="{FF2B5EF4-FFF2-40B4-BE49-F238E27FC236}">
-                <a16:creationId xmlns:a16="http://schemas.microsoft.com/office/drawing/2014/main" id="{C3E4798F-8813-BFAE-6715-10547664D228}"/>
+                <a16:creationId xmlns:a16="http://schemas.microsoft.com/office/drawing/2014/main" id="{2E614CE7-2FFA-E8D7-3EDB-4818E541601D}"/>
               </a:ext>
             </a:extLst>
           </p:cNvPr>
@@ -3195,7 +3195,7 @@
             </a:lvl1pPr>
           </a:lstStyle>
           <a:p>
-            <a:fld id="{1976ACAB-01B6-49D9-BEB0-30BD540AD216}" type="datetimeFigureOut">
+            <a:fld id="{D13547F7-58F2-4860-A5CB-7650EEC5A09F}" type="datetimeFigureOut">
               <a:rPr kumimoji="1" lang="ja-JP" altLang="en-US" smtClean="0"/>
               <a:t>2026/7/30</a:t>
             </a:fld>
@@ -3208,7 +3208,7 @@
           <p:cNvPr id="5" name="フッター プレースホルダー 4">
             <a:extLst>
               <a:ext uri="{FF2B5EF4-FFF2-40B4-BE49-F238E27FC236}">
-                <a16:creationId xmlns:a16="http://schemas.microsoft.com/office/drawing/2014/main" id="{3546E675-6423-D66C-8AE6-52F0AC0165EA}"/>
+                <a16:creationId xmlns:a16="http://schemas.microsoft.com/office/drawing/2014/main" id="{196B1DCC-E7A9-B4B5-83D2-2C49D6BC01A6}"/>
               </a:ext>
             </a:extLst>
           </p:cNvPr>
@@ -3251,7 +3251,7 @@
           <p:cNvPr id="6" name="スライド番号プレースホルダー 5">
             <a:extLst>
               <a:ext uri="{FF2B5EF4-FFF2-40B4-BE49-F238E27FC236}">
-                <a16:creationId xmlns:a16="http://schemas.microsoft.com/office/drawing/2014/main" id="{420D5EF0-0346-3AAF-ACE6-12BF31C6CD52}"/>
+                <a16:creationId xmlns:a16="http://schemas.microsoft.com/office/drawing/2014/main" id="{D47E5776-04BD-8163-92A1-5C4D8EAF3D9C}"/>
               </a:ext>
             </a:extLst>
           </p:cNvPr>
@@ -3285,7 +3285,7 @@
             </a:lvl1pPr>
           </a:lstStyle>
           <a:p>
-            <a:fld id="{76155B34-8CEE-461C-8ACA-DA9D806EAADE}" type="slidenum">
+            <a:fld id="{2FE1FC7E-FF4E-4E42-A3E1-BBB7562D1753}" type="slidenum">
               <a:rPr kumimoji="1" lang="ja-JP" altLang="en-US" smtClean="0"/>
               <a:t>‹#›</a:t>
             </a:fld>
@@ -3296,7 +3296,7 @@
     </p:spTree>
     <p:extLst>
       <p:ext uri="{BB962C8B-B14F-4D97-AF65-F5344CB8AC3E}">
-        <p14:creationId xmlns:p14="http://schemas.microsoft.com/office/powerpoint/2010/main" val="1238475819"/>
+        <p14:creationId xmlns:p14="http://schemas.microsoft.com/office/powerpoint/2010/main" val="3556496628"/>
       </p:ext>
     </p:extLst>
   </p:cSld>
@@ -3619,7 +3619,7 @@
           <p:cNvPr id="2" name="テキスト ボックス 1">
             <a:extLst>
               <a:ext uri="{FF2B5EF4-FFF2-40B4-BE49-F238E27FC236}">
-                <a16:creationId xmlns:a16="http://schemas.microsoft.com/office/drawing/2014/main" id="{217F59F6-1FBE-2C36-6E2A-53B5B3AA56C7}"/>
+                <a16:creationId xmlns:a16="http://schemas.microsoft.com/office/drawing/2014/main" id="{6D8192B7-DEFF-A128-6EAB-BF0A91A5BA6E}"/>
               </a:ext>
             </a:extLst>
           </p:cNvPr>
@@ -3665,7 +3665,7 @@
           <p:cNvPr id="3" name="テキスト ボックス 2">
             <a:extLst>
               <a:ext uri="{FF2B5EF4-FFF2-40B4-BE49-F238E27FC236}">
-                <a16:creationId xmlns:a16="http://schemas.microsoft.com/office/drawing/2014/main" id="{1DC7EBCC-9BE2-0EC4-BECA-0D68F7B8847C}"/>
+                <a16:creationId xmlns:a16="http://schemas.microsoft.com/office/drawing/2014/main" id="{CE5AAC88-DC98-7EF5-C91B-2BB7B9FC05EA}"/>
               </a:ext>
             </a:extLst>
           </p:cNvPr>
@@ -3714,7 +3714,7 @@
           <p:cNvPr id="4" name="テキスト ボックス 3">
             <a:extLst>
               <a:ext uri="{FF2B5EF4-FFF2-40B4-BE49-F238E27FC236}">
-                <a16:creationId xmlns:a16="http://schemas.microsoft.com/office/drawing/2014/main" id="{E2B21FC2-298D-D9F9-9359-736353343D0D}"/>
+                <a16:creationId xmlns:a16="http://schemas.microsoft.com/office/drawing/2014/main" id="{D89F68BC-E581-1A55-A605-0FA0B6EAFDA2}"/>
               </a:ext>
             </a:extLst>
           </p:cNvPr>
@@ -3754,7 +3754,7 @@
           <p:cNvPr id="5" name="テキスト ボックス 4">
             <a:extLst>
               <a:ext uri="{FF2B5EF4-FFF2-40B4-BE49-F238E27FC236}">
-                <a16:creationId xmlns:a16="http://schemas.microsoft.com/office/drawing/2014/main" id="{426CDEE0-B98D-A766-FF89-7AF4B8983CC2}"/>
+                <a16:creationId xmlns:a16="http://schemas.microsoft.com/office/drawing/2014/main" id="{B671547A-6325-E85C-C9F9-FFF3928A75E3}"/>
               </a:ext>
             </a:extLst>
           </p:cNvPr>
@@ -3801,7 +3801,7 @@
             <a:hlinkClick r:id="" action="ppaction://media"/>
             <a:extLst>
               <a:ext uri="{FF2B5EF4-FFF2-40B4-BE49-F238E27FC236}">
-                <a16:creationId xmlns:a16="http://schemas.microsoft.com/office/drawing/2014/main" id="{7A896A48-61E8-0B54-F070-9A6FF001D807}"/>
+                <a16:creationId xmlns:a16="http://schemas.microsoft.com/office/drawing/2014/main" id="{E38AF8D7-A30F-AF01-C747-CBF867813A4A}"/>
               </a:ext>
             </a:extLst>
           </p:cNvPr>
@@ -3836,7 +3836,7 @@
     </p:spTree>
     <p:extLst>
       <p:ext uri="{BB962C8B-B14F-4D97-AF65-F5344CB8AC3E}">
-        <p14:creationId xmlns:p14="http://schemas.microsoft.com/office/powerpoint/2010/main" val="2639834878"/>
+        <p14:creationId xmlns:p14="http://schemas.microsoft.com/office/powerpoint/2010/main" val="3293917026"/>
       </p:ext>
     </p:extLst>
   </p:cSld>
@@ -3960,7 +3960,7 @@
           <p:cNvPr id="2" name="テキスト ボックス 1">
             <a:extLst>
               <a:ext uri="{FF2B5EF4-FFF2-40B4-BE49-F238E27FC236}">
-                <a16:creationId xmlns:a16="http://schemas.microsoft.com/office/drawing/2014/main" id="{2854E048-CD6F-8E05-04EA-0162F8D81280}"/>
+                <a16:creationId xmlns:a16="http://schemas.microsoft.com/office/drawing/2014/main" id="{C2C8083F-63DA-672C-25FF-592F48B57151}"/>
               </a:ext>
             </a:extLst>
           </p:cNvPr>
@@ -4006,7 +4006,7 @@
           <p:cNvPr id="3" name="テキスト ボックス 2">
             <a:extLst>
               <a:ext uri="{FF2B5EF4-FFF2-40B4-BE49-F238E27FC236}">
-                <a16:creationId xmlns:a16="http://schemas.microsoft.com/office/drawing/2014/main" id="{3B15E1F7-13FC-E14E-781A-E08EBA63886A}"/>
+                <a16:creationId xmlns:a16="http://schemas.microsoft.com/office/drawing/2014/main" id="{02433ACD-A7ED-0A1E-2A8B-1C268CB93FB7}"/>
               </a:ext>
             </a:extLst>
           </p:cNvPr>
@@ -4046,7 +4046,7 @@
           <p:cNvPr id="4" name="テキスト ボックス 3">
             <a:extLst>
               <a:ext uri="{FF2B5EF4-FFF2-40B4-BE49-F238E27FC236}">
-                <a16:creationId xmlns:a16="http://schemas.microsoft.com/office/drawing/2014/main" id="{9CD618D5-1B96-8238-B052-46676BD34C54}"/>
+                <a16:creationId xmlns:a16="http://schemas.microsoft.com/office/drawing/2014/main" id="{44656A36-08FF-6DDD-D141-200AB131420D}"/>
               </a:ext>
             </a:extLst>
           </p:cNvPr>
@@ -4076,14 +4076,17 @@
                 </a:solidFill>
                 <a:latin typeface="Arial" panose="020B0604020202020204" pitchFamily="34" charset="0"/>
               </a:rPr>
-              <a:t>This is a Next</a:t>
-            </a:r>
-            <a:endParaRPr kumimoji="1" lang="ja-JP" altLang="en-US" sz="2000">
-              <a:solidFill>
-                <a:srgbClr val="333333"/>
-              </a:solidFill>
-              <a:latin typeface="Arial" panose="020B0604020202020204" pitchFamily="34" charset="0"/>
-            </a:endParaRPr>
+              <a:t>Smoking Spot Finder</a:t>
+            </a:r>
+            <a:r>
+              <a:rPr kumimoji="1" lang="ja-JP" altLang="en-US" sz="2000">
+                <a:solidFill>
+                  <a:srgbClr val="333333"/>
+                </a:solidFill>
+                <a:latin typeface="Arial" panose="020B0604020202020204" pitchFamily="34" charset="0"/>
+              </a:rPr>
+              <a:t>の目的、構成、実装を公開コードから確認できるプロジェクトです。</a:t>
+            </a:r>
           </a:p>
         </p:txBody>
       </p:sp>
@@ -4092,7 +4095,7 @@
           <p:cNvPr id="5" name="テキスト ボックス 4">
             <a:extLst>
               <a:ext uri="{FF2B5EF4-FFF2-40B4-BE49-F238E27FC236}">
-                <a16:creationId xmlns:a16="http://schemas.microsoft.com/office/drawing/2014/main" id="{7A099166-CC09-531F-C9DE-50FC22B7B31C}"/>
+                <a16:creationId xmlns:a16="http://schemas.microsoft.com/office/drawing/2014/main" id="{83A13F3F-E831-07CA-2F7C-C515079EDB09}"/>
               </a:ext>
             </a:extLst>
           </p:cNvPr>
@@ -4139,7 +4142,7 @@
             <a:hlinkClick r:id="" action="ppaction://media"/>
             <a:extLst>
               <a:ext uri="{FF2B5EF4-FFF2-40B4-BE49-F238E27FC236}">
-                <a16:creationId xmlns:a16="http://schemas.microsoft.com/office/drawing/2014/main" id="{19E0714E-875A-9E91-687A-F00A0E335B7A}"/>
+                <a16:creationId xmlns:a16="http://schemas.microsoft.com/office/drawing/2014/main" id="{EBE74F4F-C9FB-C39B-5D98-3C2490148FD4}"/>
               </a:ext>
             </a:extLst>
           </p:cNvPr>
@@ -4174,7 +4177,7 @@
     </p:spTree>
     <p:extLst>
       <p:ext uri="{BB962C8B-B14F-4D97-AF65-F5344CB8AC3E}">
-        <p14:creationId xmlns:p14="http://schemas.microsoft.com/office/powerpoint/2010/main" val="469921222"/>
+        <p14:creationId xmlns:p14="http://schemas.microsoft.com/office/powerpoint/2010/main" val="3441460934"/>
       </p:ext>
     </p:extLst>
   </p:cSld>
@@ -4183,10 +4186,10 @@
   </p:clrMapOvr>
   <mc:AlternateContent xmlns:mc="http://schemas.openxmlformats.org/markup-compatibility/2006">
     <mc:Choice xmlns:p14="http://schemas.microsoft.com/office/powerpoint/2010/main" Requires="p14">
-      <p:transition spd="slow" p14:dur="2000" advTm="5000"/>
+      <p:transition spd="slow" p14:dur="2000" advTm="9000"/>
     </mc:Choice>
     <mc:Fallback>
-      <p:transition spd="slow" advTm="5000"/>
+      <p:transition spd="slow" advTm="9000"/>
     </mc:Fallback>
   </mc:AlternateContent>
   <p:timing>
@@ -4217,7 +4220,7 @@
                                   <p:childTnLst>
                                     <p:cmd type="call" cmd="playFrom(0.0)">
                                       <p:cBhvr>
-                                        <p:cTn id="6" dur="2148" fill="hold"/>
+                                        <p:cTn id="6" dur="8026" fill="hold"/>
                                         <p:tgtEl>
                                           <p:spTgt spid="6"/>
                                         </p:tgtEl>
@@ -4298,7 +4301,7 @@
           <p:cNvPr id="2" name="テキスト ボックス 1">
             <a:extLst>
               <a:ext uri="{FF2B5EF4-FFF2-40B4-BE49-F238E27FC236}">
-                <a16:creationId xmlns:a16="http://schemas.microsoft.com/office/drawing/2014/main" id="{108FA50B-1410-AB9D-1880-9B78F7F766D8}"/>
+                <a16:creationId xmlns:a16="http://schemas.microsoft.com/office/drawing/2014/main" id="{6E2CDE51-7EC0-CD01-87C0-05F013F03B50}"/>
               </a:ext>
             </a:extLst>
           </p:cNvPr>
@@ -4344,7 +4347,7 @@
           <p:cNvPr id="3" name="テキスト ボックス 2">
             <a:extLst>
               <a:ext uri="{FF2B5EF4-FFF2-40B4-BE49-F238E27FC236}">
-                <a16:creationId xmlns:a16="http://schemas.microsoft.com/office/drawing/2014/main" id="{BBA70244-9D30-7616-2D61-9D0312A15F6B}"/>
+                <a16:creationId xmlns:a16="http://schemas.microsoft.com/office/drawing/2014/main" id="{612CA9D3-8FF5-1EB6-DB61-8069945B5232}"/>
               </a:ext>
             </a:extLst>
           </p:cNvPr>
@@ -4384,7 +4387,7 @@
           <p:cNvPr id="4" name="テキスト ボックス 3">
             <a:extLst>
               <a:ext uri="{FF2B5EF4-FFF2-40B4-BE49-F238E27FC236}">
-                <a16:creationId xmlns:a16="http://schemas.microsoft.com/office/drawing/2014/main" id="{2FA0A9D7-3D6C-2305-4643-3D17B7387BAE}"/>
+                <a16:creationId xmlns:a16="http://schemas.microsoft.com/office/drawing/2014/main" id="{35435EB3-2C44-3909-D927-596914D8D702}"/>
               </a:ext>
             </a:extLst>
           </p:cNvPr>
@@ -4497,7 +4500,7 @@
           <p:cNvPr id="5" name="テキスト ボックス 4">
             <a:extLst>
               <a:ext uri="{FF2B5EF4-FFF2-40B4-BE49-F238E27FC236}">
-                <a16:creationId xmlns:a16="http://schemas.microsoft.com/office/drawing/2014/main" id="{5E267C5E-EBAF-4912-6123-FA10A7F0D2C4}"/>
+                <a16:creationId xmlns:a16="http://schemas.microsoft.com/office/drawing/2014/main" id="{60DFBDC9-ADE1-3FC4-7FD1-17BFA191B0A7}"/>
               </a:ext>
             </a:extLst>
           </p:cNvPr>
@@ -4544,7 +4547,7 @@
             <a:hlinkClick r:id="" action="ppaction://media"/>
             <a:extLst>
               <a:ext uri="{FF2B5EF4-FFF2-40B4-BE49-F238E27FC236}">
-                <a16:creationId xmlns:a16="http://schemas.microsoft.com/office/drawing/2014/main" id="{D5F7A866-B789-650F-9A5B-B5A4F48EF64F}"/>
+                <a16:creationId xmlns:a16="http://schemas.microsoft.com/office/drawing/2014/main" id="{545B4C6E-9CCF-D5BE-0044-6D495BBD2A38}"/>
               </a:ext>
             </a:extLst>
           </p:cNvPr>
@@ -4579,7 +4582,7 @@
     </p:spTree>
     <p:extLst>
       <p:ext uri="{BB962C8B-B14F-4D97-AF65-F5344CB8AC3E}">
-        <p14:creationId xmlns:p14="http://schemas.microsoft.com/office/powerpoint/2010/main" val="2114730499"/>
+        <p14:creationId xmlns:p14="http://schemas.microsoft.com/office/powerpoint/2010/main" val="1297374571"/>
       </p:ext>
     </p:extLst>
   </p:cSld>
@@ -4703,7 +4706,7 @@
           <p:cNvPr id="2" name="テキスト ボックス 1">
             <a:extLst>
               <a:ext uri="{FF2B5EF4-FFF2-40B4-BE49-F238E27FC236}">
-                <a16:creationId xmlns:a16="http://schemas.microsoft.com/office/drawing/2014/main" id="{79B5EDBE-769F-FA49-638F-277265E8DBCB}"/>
+                <a16:creationId xmlns:a16="http://schemas.microsoft.com/office/drawing/2014/main" id="{9CA1CBF5-3CE2-083D-0D41-90877DD2C36B}"/>
               </a:ext>
             </a:extLst>
           </p:cNvPr>
@@ -4749,7 +4752,7 @@
           <p:cNvPr id="3" name="テキスト ボックス 2">
             <a:extLst>
               <a:ext uri="{FF2B5EF4-FFF2-40B4-BE49-F238E27FC236}">
-                <a16:creationId xmlns:a16="http://schemas.microsoft.com/office/drawing/2014/main" id="{BC54E967-DF36-5AFD-64DB-009319F96B04}"/>
+                <a16:creationId xmlns:a16="http://schemas.microsoft.com/office/drawing/2014/main" id="{10CDADA4-5F5D-4669-F0AD-3FA5B074C264}"/>
               </a:ext>
             </a:extLst>
           </p:cNvPr>
@@ -4789,7 +4792,7 @@
           <p:cNvPr id="4" name="テキスト ボックス 3">
             <a:extLst>
               <a:ext uri="{FF2B5EF4-FFF2-40B4-BE49-F238E27FC236}">
-                <a16:creationId xmlns:a16="http://schemas.microsoft.com/office/drawing/2014/main" id="{1FD38409-034B-B4D7-9A31-7F8614A64251}"/>
+                <a16:creationId xmlns:a16="http://schemas.microsoft.com/office/drawing/2014/main" id="{9D1B6BFD-8575-A0E2-3077-D42982079BB6}"/>
               </a:ext>
             </a:extLst>
           </p:cNvPr>
@@ -4899,7 +4902,7 @@
           <p:cNvPr id="5" name="テキスト ボックス 4">
             <a:extLst>
               <a:ext uri="{FF2B5EF4-FFF2-40B4-BE49-F238E27FC236}">
-                <a16:creationId xmlns:a16="http://schemas.microsoft.com/office/drawing/2014/main" id="{AE326884-8D5D-4709-0557-6AFBD1A0C0B1}"/>
+                <a16:creationId xmlns:a16="http://schemas.microsoft.com/office/drawing/2014/main" id="{FE67E8CE-C939-66AA-2D32-C29D10B26E04}"/>
               </a:ext>
             </a:extLst>
           </p:cNvPr>
@@ -4946,7 +4949,7 @@
             <a:hlinkClick r:id="" action="ppaction://media"/>
             <a:extLst>
               <a:ext uri="{FF2B5EF4-FFF2-40B4-BE49-F238E27FC236}">
-                <a16:creationId xmlns:a16="http://schemas.microsoft.com/office/drawing/2014/main" id="{79294140-8E62-C04F-2333-05C519F50261}"/>
+                <a16:creationId xmlns:a16="http://schemas.microsoft.com/office/drawing/2014/main" id="{E4E3ABDA-5AC7-31E9-C819-BE9A017E8428}"/>
               </a:ext>
             </a:extLst>
           </p:cNvPr>
@@ -4981,7 +4984,7 @@
     </p:spTree>
     <p:extLst>
       <p:ext uri="{BB962C8B-B14F-4D97-AF65-F5344CB8AC3E}">
-        <p14:creationId xmlns:p14="http://schemas.microsoft.com/office/powerpoint/2010/main" val="2767980243"/>
+        <p14:creationId xmlns:p14="http://schemas.microsoft.com/office/powerpoint/2010/main" val="149912221"/>
       </p:ext>
     </p:extLst>
   </p:cSld>
@@ -5105,7 +5108,7 @@
           <p:cNvPr id="2" name="テキスト ボックス 1">
             <a:extLst>
               <a:ext uri="{FF2B5EF4-FFF2-40B4-BE49-F238E27FC236}">
-                <a16:creationId xmlns:a16="http://schemas.microsoft.com/office/drawing/2014/main" id="{4AF412FA-76D4-FA8B-D09C-32FF8CFAFD42}"/>
+                <a16:creationId xmlns:a16="http://schemas.microsoft.com/office/drawing/2014/main" id="{F429E987-FFCC-FD8C-E1FF-6E1779DD1767}"/>
               </a:ext>
             </a:extLst>
           </p:cNvPr>
@@ -5151,7 +5154,7 @@
           <p:cNvPr id="3" name="テキスト ボックス 2">
             <a:extLst>
               <a:ext uri="{FF2B5EF4-FFF2-40B4-BE49-F238E27FC236}">
-                <a16:creationId xmlns:a16="http://schemas.microsoft.com/office/drawing/2014/main" id="{6ECF6627-98E1-DA48-55AC-4DB34A2DDF34}"/>
+                <a16:creationId xmlns:a16="http://schemas.microsoft.com/office/drawing/2014/main" id="{768F851F-092D-AD57-4C50-7592336B52EC}"/>
               </a:ext>
             </a:extLst>
           </p:cNvPr>
@@ -5191,7 +5194,7 @@
           <p:cNvPr id="4" name="テキスト ボックス 3">
             <a:extLst>
               <a:ext uri="{FF2B5EF4-FFF2-40B4-BE49-F238E27FC236}">
-                <a16:creationId xmlns:a16="http://schemas.microsoft.com/office/drawing/2014/main" id="{7BA021F1-174F-4D5A-9D35-FDDBD49105BE}"/>
+                <a16:creationId xmlns:a16="http://schemas.microsoft.com/office/drawing/2014/main" id="{1E2FE2F5-3725-FC3D-96FC-E453D86C58BF}"/>
               </a:ext>
             </a:extLst>
           </p:cNvPr>
@@ -5215,20 +5218,14 @@
           <a:lstStyle/>
           <a:p>
             <a:r>
-              <a:rPr kumimoji="1" lang="en-US" altLang="ja-JP" sz="2000">
+              <a:rPr kumimoji="1" lang="ja-JP" altLang="en-US" sz="2000">
                 <a:solidFill>
                   <a:srgbClr val="333333"/>
                 </a:solidFill>
                 <a:latin typeface="Arial" panose="020B0604020202020204" pitchFamily="34" charset="0"/>
               </a:rPr>
-              <a:t>Add Nagoya station MVP page</a:t>
-            </a:r>
-            <a:endParaRPr kumimoji="1" lang="ja-JP" altLang="en-US" sz="2000">
-              <a:solidFill>
-                <a:srgbClr val="333333"/>
-              </a:solidFill>
-              <a:latin typeface="Arial" panose="020B0604020202020204" pitchFamily="34" charset="0"/>
-            </a:endParaRPr>
+              <a:t>直近のコミットでは、新機能の追加と実装強化が行われました。</a:t>
+            </a:r>
           </a:p>
         </p:txBody>
       </p:sp>
@@ -5237,7 +5234,7 @@
           <p:cNvPr id="5" name="テキスト ボックス 4">
             <a:extLst>
               <a:ext uri="{FF2B5EF4-FFF2-40B4-BE49-F238E27FC236}">
-                <a16:creationId xmlns:a16="http://schemas.microsoft.com/office/drawing/2014/main" id="{2816F2C2-2B8D-67D0-E6E0-7BF02CEEC20E}"/>
+                <a16:creationId xmlns:a16="http://schemas.microsoft.com/office/drawing/2014/main" id="{9AC165FD-652A-729A-FA6B-405A40F63B70}"/>
               </a:ext>
             </a:extLst>
           </p:cNvPr>
@@ -5284,7 +5281,7 @@
             <a:hlinkClick r:id="" action="ppaction://media"/>
             <a:extLst>
               <a:ext uri="{FF2B5EF4-FFF2-40B4-BE49-F238E27FC236}">
-                <a16:creationId xmlns:a16="http://schemas.microsoft.com/office/drawing/2014/main" id="{0CD552E3-E5F4-0BAF-3ADB-4577810180F1}"/>
+                <a16:creationId xmlns:a16="http://schemas.microsoft.com/office/drawing/2014/main" id="{3DA37F9E-1B77-5866-65FA-B69C164F3CD0}"/>
               </a:ext>
             </a:extLst>
           </p:cNvPr>
@@ -5319,7 +5316,7 @@
     </p:spTree>
     <p:extLst>
       <p:ext uri="{BB962C8B-B14F-4D97-AF65-F5344CB8AC3E}">
-        <p14:creationId xmlns:p14="http://schemas.microsoft.com/office/powerpoint/2010/main" val="905923116"/>
+        <p14:creationId xmlns:p14="http://schemas.microsoft.com/office/powerpoint/2010/main" val="2050477853"/>
       </p:ext>
     </p:extLst>
   </p:cSld>
@@ -5328,10 +5325,10 @@
   </p:clrMapOvr>
   <mc:AlternateContent xmlns:mc="http://schemas.openxmlformats.org/markup-compatibility/2006">
     <mc:Choice xmlns:p14="http://schemas.microsoft.com/office/powerpoint/2010/main" Requires="p14">
-      <p:transition spd="slow" p14:dur="2000" advTm="7000"/>
+      <p:transition spd="slow" p14:dur="2000" advTm="6000"/>
     </mc:Choice>
     <mc:Fallback>
-      <p:transition spd="slow" advTm="7000"/>
+      <p:transition spd="slow" advTm="6000"/>
     </mc:Fallback>
   </mc:AlternateContent>
   <p:timing>
@@ -5362,7 +5359,7 @@
                                   <p:childTnLst>
                                     <p:cmd type="call" cmd="playFrom(0.0)">
                                       <p:cBhvr>
-                                        <p:cTn id="6" dur="6736" fill="hold"/>
+                                        <p:cTn id="6" dur="5687" fill="hold"/>
                                         <p:tgtEl>
                                           <p:spTgt spid="6"/>
                                         </p:tgtEl>
@@ -5443,7 +5440,7 @@
           <p:cNvPr id="2" name="テキスト ボックス 1">
             <a:extLst>
               <a:ext uri="{FF2B5EF4-FFF2-40B4-BE49-F238E27FC236}">
-                <a16:creationId xmlns:a16="http://schemas.microsoft.com/office/drawing/2014/main" id="{44D54B6F-6F95-3160-EEEF-001020EE5F27}"/>
+                <a16:creationId xmlns:a16="http://schemas.microsoft.com/office/drawing/2014/main" id="{021F25EC-7EB4-5A17-39DE-99595C7AAB95}"/>
               </a:ext>
             </a:extLst>
           </p:cNvPr>
@@ -5489,7 +5486,7 @@
           <p:cNvPr id="3" name="テキスト ボックス 2">
             <a:extLst>
               <a:ext uri="{FF2B5EF4-FFF2-40B4-BE49-F238E27FC236}">
-                <a16:creationId xmlns:a16="http://schemas.microsoft.com/office/drawing/2014/main" id="{91334F9D-92AF-51D5-ADED-20EB14D50926}"/>
+                <a16:creationId xmlns:a16="http://schemas.microsoft.com/office/drawing/2014/main" id="{BFB0745D-2805-907C-BC4C-F00FC4F3C13C}"/>
               </a:ext>
             </a:extLst>
           </p:cNvPr>
@@ -5529,7 +5526,7 @@
           <p:cNvPr id="4" name="テキスト ボックス 3">
             <a:extLst>
               <a:ext uri="{FF2B5EF4-FFF2-40B4-BE49-F238E27FC236}">
-                <a16:creationId xmlns:a16="http://schemas.microsoft.com/office/drawing/2014/main" id="{ED4ABE74-4379-924F-2E2C-05DEC7BE1851}"/>
+                <a16:creationId xmlns:a16="http://schemas.microsoft.com/office/drawing/2014/main" id="{1D95D054-4475-21E4-381B-0C2F4A67CBC6}"/>
               </a:ext>
             </a:extLst>
           </p:cNvPr>
@@ -5594,7 +5591,7 @@
           <p:cNvPr id="5" name="テキスト ボックス 4">
             <a:extLst>
               <a:ext uri="{FF2B5EF4-FFF2-40B4-BE49-F238E27FC236}">
-                <a16:creationId xmlns:a16="http://schemas.microsoft.com/office/drawing/2014/main" id="{3CBB8489-F006-E6A0-C345-D578F2DBF7DA}"/>
+                <a16:creationId xmlns:a16="http://schemas.microsoft.com/office/drawing/2014/main" id="{57148594-D6C5-8152-A58D-0BC01C1BA466}"/>
               </a:ext>
             </a:extLst>
           </p:cNvPr>
@@ -5641,7 +5638,7 @@
             <a:hlinkClick r:id="" action="ppaction://media"/>
             <a:extLst>
               <a:ext uri="{FF2B5EF4-FFF2-40B4-BE49-F238E27FC236}">
-                <a16:creationId xmlns:a16="http://schemas.microsoft.com/office/drawing/2014/main" id="{BAB7889C-AE1F-169D-B0A9-261CBE0276C3}"/>
+                <a16:creationId xmlns:a16="http://schemas.microsoft.com/office/drawing/2014/main" id="{DD307F2A-83DD-2170-0A83-B2D7D316457A}"/>
               </a:ext>
             </a:extLst>
           </p:cNvPr>
@@ -5676,7 +5673,7 @@
     </p:spTree>
     <p:extLst>
       <p:ext uri="{BB962C8B-B14F-4D97-AF65-F5344CB8AC3E}">
-        <p14:creationId xmlns:p14="http://schemas.microsoft.com/office/powerpoint/2010/main" val="432514839"/>
+        <p14:creationId xmlns:p14="http://schemas.microsoft.com/office/powerpoint/2010/main" val="894330481"/>
       </p:ext>
     </p:extLst>
   </p:cSld>
